--- a/pptx/midterm/REMUS_Background_Slide_5.pptx
+++ b/pptx/midterm/REMUS_Background_Slide_5.pptx
@@ -5,10 +5,10 @@
     <p:sldMasterId xmlns:r="http://schemas.openxmlformats.org/officeDocument/2006/relationships" id="2147483648" r:id="rId1"/>
   </p:sldMasterIdLst>
   <p:notesMasterIdLst>
-    <p:notesMasterId r:id="R65e6452f62aa4bb8"/>
+    <p:notesMasterId r:id="Raa3df616ff8d45e0"/>
   </p:notesMasterIdLst>
   <p:sldIdLst>
-    <p:sldId id="256" r:id="Redfcb01452bf4c9f"/>
+    <p:sldId id="256" r:id="Rd9c9303ef08b4088"/>
   </p:sldIdLst>
   <p:sldSz cx="12192000" cy="6858000" type="screen16x9"/>
   <p:notesSz cx="6858000" cy="9144000"/>
@@ -775,8 +775,8 @@
 </file>
 
 <file path=ppt/slides/slide1.xml><?xml version="1.0" encoding="utf-8"?>
-<p:sld xmlns:a="http://schemas.openxmlformats.org/drawingml/2006/main" xmlns:p="http://schemas.openxmlformats.org/presentationml/2006/main">
-  <p:cSld>
+<p:sld xmlns:a="http://schemas.openxmlformats.org/drawingml/2006/main" xmlns:r="http://schemas.openxmlformats.org/officeDocument/2006/relationships" xmlns:p="http://schemas.openxmlformats.org/presentationml/2006/main">
+  <p:cSld xmlns:a="http://schemas.openxmlformats.org/drawingml/2006/main" xmlns:p="http://schemas.openxmlformats.org/presentationml/2006/main" xmlns:r="http://schemas.openxmlformats.org/officeDocument/2006/relationships">
     <p:bg>
       <p:bgPr>
         <a:solidFill xmlns:a="http://schemas.openxmlformats.org/drawingml/2006/main">
@@ -814,16 +814,27 @@
             <a:noAutofit/>
           </a:bodyPr>
           <a:lstStyle xmlns:a="http://schemas.openxmlformats.org/drawingml/2006/main"/>
-          <a:p xmlns:a="http://schemas.openxmlformats.org/drawingml/2006/main">
-            <a:r>
-              <a:rPr lang="en-US" sz="3000" b="1">
+          <a:p>
+            <a:pPr algn="l">
+              <a:lnSpc>
+                <a:spcPct val="90000"/>
+              </a:lnSpc>
+              <a:defRPr sz="3000" b="1">
                 <a:solidFill>
                   <a:srgbClr val="183B56"/>
                 </a:solidFill>
                 <a:latin typeface="Arial"/>
                 <a:ea typeface="Arial"/>
+              </a:defRPr>
+            </a:pPr>
+            <a:r>
+              <a:rPr sz="3000" b="1">
+                <a:solidFill>
+                  <a:srgbClr val="183B56"/>
+                </a:solidFill>
+                <a:latin typeface="Arial"/>
               </a:rPr>
-              <a:t>5. REMUS: Overall Workflow and Mid-Term Scope</a:t>
+              <a:t>REMUS: Overall Workflow and Mid-Term Scope</a:t>
             </a:r>
           </a:p>
         </p:txBody>
@@ -1837,7 +1848,7 @@
           <p:nvPr/>
         </p:nvPicPr>
         <p:blipFill>
-          <a:blip xmlns:r="http://schemas.openxmlformats.org/officeDocument/2006/relationships" r:embed="R929d8bcde8104f70"/>
+          <a:blip xmlns:r="http://schemas.openxmlformats.org/officeDocument/2006/relationships" r:embed="Rfb26429d0c184e71"/>
           <a:srcRect l="22807" t="18580" r="21929" b="14354"/>
           <a:stretch>
             <a:fillRect/>
@@ -1845,7 +1856,7 @@
         </p:blipFill>
         <p:spPr>
           <a:xfrm>
-            <a:off x="781812" y="3218688"/>
+            <a:off x="781812" y="2980944"/>
             <a:ext cx="1014984" cy="1231748"/>
           </a:xfrm>
           <a:prstGeom prst="rect">
@@ -1862,7 +1873,7 @@
           <p:nvPr/>
         </p:nvPicPr>
         <p:blipFill>
-          <a:blip xmlns:r="http://schemas.openxmlformats.org/officeDocument/2006/relationships" r:embed="Rbb0253b9b05647a8"/>
+          <a:blip xmlns:r="http://schemas.openxmlformats.org/officeDocument/2006/relationships" r:embed="R1984d9b74c864437"/>
           <a:srcRect l="15869" t="18660" r="15789" b="18660"/>
           <a:stretch>
             <a:fillRect/>
@@ -1870,7 +1881,7 @@
         </p:blipFill>
         <p:spPr>
           <a:xfrm>
-            <a:off x="2816352" y="3273552"/>
+            <a:off x="2816352" y="3014907"/>
             <a:ext cx="1325880" cy="1216035"/>
           </a:xfrm>
           <a:prstGeom prst="rect">
@@ -1887,7 +1898,7 @@
           <p:nvPr/>
         </p:nvPicPr>
         <p:blipFill>
-          <a:blip xmlns:r="http://schemas.openxmlformats.org/officeDocument/2006/relationships" r:embed="Rf9e3b060ec4342c1"/>
+          <a:blip xmlns:r="http://schemas.openxmlformats.org/officeDocument/2006/relationships" r:embed="Rbe03d3b990204695"/>
           <a:srcRect l="21371" t="23684" r="21291" b="20972"/>
           <a:stretch>
             <a:fillRect/>
@@ -1895,7 +1906,7 @@
         </p:blipFill>
         <p:spPr>
           <a:xfrm>
-            <a:off x="5138928" y="3310128"/>
+            <a:off x="5138928" y="3381381"/>
             <a:ext cx="457200" cy="441303"/>
           </a:xfrm>
           <a:prstGeom prst="rect">
@@ -1912,7 +1923,7 @@
           <p:nvPr/>
         </p:nvPicPr>
         <p:blipFill>
-          <a:blip xmlns:r="http://schemas.openxmlformats.org/officeDocument/2006/relationships" r:embed="R9553ab4c34234c1f"/>
+          <a:blip xmlns:r="http://schemas.openxmlformats.org/officeDocument/2006/relationships" r:embed="Rb40915c6070843e2"/>
           <a:srcRect l="21371" t="23684" r="21291" b="20972"/>
           <a:stretch>
             <a:fillRect/>
@@ -1920,7 +1931,7 @@
         </p:blipFill>
         <p:spPr>
           <a:xfrm>
-            <a:off x="5961888" y="3310128"/>
+            <a:off x="5961888" y="3381381"/>
             <a:ext cx="457200" cy="441303"/>
           </a:xfrm>
           <a:prstGeom prst="rect">
@@ -1937,7 +1948,7 @@
           <p:nvPr/>
         </p:nvPicPr>
         <p:blipFill>
-          <a:blip xmlns:r="http://schemas.openxmlformats.org/officeDocument/2006/relationships" r:embed="Rab07b5aec71a431a"/>
+          <a:blip xmlns:r="http://schemas.openxmlformats.org/officeDocument/2006/relationships" r:embed="R13ce9b7ec8d2457e"/>
           <a:srcRect l="21371" t="23684" r="21291" b="20972"/>
           <a:stretch>
             <a:fillRect/>
@@ -1945,7 +1956,7 @@
         </p:blipFill>
         <p:spPr>
           <a:xfrm>
-            <a:off x="5138928" y="3822192"/>
+            <a:off x="5138928" y="3893445"/>
             <a:ext cx="457200" cy="441303"/>
           </a:xfrm>
           <a:prstGeom prst="rect">
@@ -1962,7 +1973,7 @@
           <p:nvPr/>
         </p:nvPicPr>
         <p:blipFill>
-          <a:blip xmlns:r="http://schemas.openxmlformats.org/officeDocument/2006/relationships" r:embed="R23690e0597184e7d"/>
+          <a:blip xmlns:r="http://schemas.openxmlformats.org/officeDocument/2006/relationships" r:embed="R9cf2c4b472494a92"/>
           <a:srcRect l="21371" t="23684" r="21291" b="20972"/>
           <a:stretch>
             <a:fillRect/>
@@ -1970,7 +1981,7 @@
         </p:blipFill>
         <p:spPr>
           <a:xfrm>
-            <a:off x="5961888" y="3822192"/>
+            <a:off x="5961888" y="3893445"/>
             <a:ext cx="457200" cy="441303"/>
           </a:xfrm>
           <a:prstGeom prst="rect">
@@ -1989,7 +2000,7 @@
         </p:nvCxnSpPr>
         <p:spPr>
           <a:xfrm>
-            <a:off x="5596128" y="3530779"/>
+            <a:off x="5596128" y="3602032"/>
             <a:ext cx="365760" cy="0"/>
           </a:xfrm>
           <a:prstGeom prst="straightConnector1">
@@ -2013,7 +2024,7 @@
         </p:nvCxnSpPr>
         <p:spPr>
           <a:xfrm>
-            <a:off x="5596128" y="4042843"/>
+            <a:off x="5596128" y="4114096"/>
             <a:ext cx="365760" cy="0"/>
           </a:xfrm>
           <a:prstGeom prst="straightConnector1">
@@ -2037,7 +2048,7 @@
         </p:nvCxnSpPr>
         <p:spPr>
           <a:xfrm>
-            <a:off x="5367528" y="3751431"/>
+            <a:off x="5367528" y="3822684"/>
             <a:ext cx="0" cy="70761"/>
           </a:xfrm>
           <a:prstGeom prst="straightConnector1">
@@ -2061,7 +2072,7 @@
         </p:nvCxnSpPr>
         <p:spPr>
           <a:xfrm>
-            <a:off x="6190488" y="3751431"/>
+            <a:off x="6190488" y="3822684"/>
             <a:ext cx="0" cy="70761"/>
           </a:xfrm>
           <a:prstGeom prst="straightConnector1">
@@ -2099,17 +2110,16 @@
           </a:bodyPr>
           <a:lstStyle/>
           <a:p>
-            <a:pPr algn="ctr"/>
-            <a:r>
-              <a:rPr lang="en-US" sz="1100">
+            <a:pPr algn="ctr">
+              <a:defRPr sz="1100" b="0">
                 <a:solidFill>
                   <a:srgbClr val="607184"/>
                 </a:solidFill>
                 <a:latin typeface="Arial"/>
                 <a:ea typeface="Arial"/>
-              </a:rPr>
-              <a:t>Illustrative topology</a:t>
-            </a:r>
+              </a:defRPr>
+            </a:pPr>
+            <a:endParaRPr sz="1100"/>
           </a:p>
         </p:txBody>
       </p:sp>
@@ -2526,45 +2536,6 @@
           </a:ln>
         </p:spPr>
       </p:cxnSp>
-      <p:sp>
-        <p:nvSpPr>
-          <p:cNvPr id="100050" name="S05.Cycle.SyncLabel"/>
-          <p:cNvSpPr txBox="1"/>
-          <p:nvPr/>
-        </p:nvSpPr>
-        <p:spPr>
-          <a:xfrm>
-            <a:off x="7251192" y="4215384"/>
-            <a:ext cx="2203704" cy="219456"/>
-          </a:xfrm>
-          <a:prstGeom prst="rect">
-            <a:avLst/>
-          </a:prstGeom>
-          <a:noFill/>
-          <a:ln>
-            <a:noFill/>
-          </a:ln>
-        </p:spPr>
-        <p:txBody>
-          <a:bodyPr lIns="0" tIns="0" rIns="0" bIns="0">
-            <a:noAutofit/>
-          </a:bodyPr>
-          <a:lstStyle/>
-          <a:p>
-            <a:pPr algn="ctr"/>
-            <a:r>
-              <a:rPr lang="en-US" sz="1300">
-                <a:solidFill>
-                  <a:srgbClr val="183B56"/>
-                </a:solidFill>
-                <a:latin typeface="Arial"/>
-                <a:ea typeface="Arial"/>
-              </a:rPr>
-              <a:t>Synchronized</a:t>
-            </a:r>
-          </a:p>
-        </p:txBody>
-      </p:sp>
       <p:pic>
         <p:nvPicPr>
           <p:cNvPr id="100051" name="S05.State.Snapshot" descr="Global snapshot"/>
@@ -2574,7 +2545,7 @@
           <p:nvPr/>
         </p:nvPicPr>
         <p:blipFill>
-          <a:blip xmlns:r="http://schemas.openxmlformats.org/officeDocument/2006/relationships" r:embed="R15b59909bb2f4cf0"/>
+          <a:blip xmlns:r="http://schemas.openxmlformats.org/officeDocument/2006/relationships" r:embed="R0eca468e47bb443e"/>
           <a:srcRect l="16746" t="16427" r="16746" b="11961"/>
           <a:stretch>
             <a:fillRect/>
@@ -2582,7 +2553,7 @@
         </p:blipFill>
         <p:spPr>
           <a:xfrm>
-            <a:off x="10076688" y="3447288"/>
+            <a:off x="10076688" y="3566038"/>
             <a:ext cx="484632" cy="521822"/>
           </a:xfrm>
           <a:prstGeom prst="rect">
@@ -2599,7 +2570,7 @@
           <p:nvPr/>
         </p:nvPicPr>
         <p:blipFill>
-          <a:blip xmlns:r="http://schemas.openxmlformats.org/officeDocument/2006/relationships" r:embed="R3f82a8408d3a48b7"/>
+          <a:blip xmlns:r="http://schemas.openxmlformats.org/officeDocument/2006/relationships" r:embed="R52e1c8c028144cc1"/>
           <a:srcRect l="12280" t="25518" r="12200" b="19936"/>
           <a:stretch>
             <a:fillRect/>
@@ -2607,7 +2578,7 @@
         </p:blipFill>
         <p:spPr>
           <a:xfrm>
-            <a:off x="10972800" y="3456432"/>
+            <a:off x="10972800" y="3575182"/>
             <a:ext cx="704088" cy="508549"/>
           </a:xfrm>
           <a:prstGeom prst="rect">
@@ -2623,7 +2594,7 @@
         </p:nvSpPr>
         <p:spPr>
           <a:xfrm>
-            <a:off x="10616184" y="3630168"/>
+            <a:off x="10616184" y="3748918"/>
             <a:ext cx="292608" cy="164592"/>
           </a:xfrm>
           <a:prstGeom prst="rightArrow">
@@ -2677,30 +2648,16 @@
           </a:bodyPr>
           <a:lstStyle/>
           <a:p>
-            <a:pPr algn="ctr"/>
-            <a:r>
-              <a:rPr lang="en-US" sz="1200">
+            <a:pPr algn="ctr">
+              <a:defRPr sz="1200" b="0">
                 <a:solidFill>
                   <a:srgbClr val="607184"/>
                 </a:solidFill>
                 <a:latin typeface="Arial"/>
                 <a:ea typeface="Arial"/>
-              </a:rPr>
-              <a:t>Restore / replay</a:t>
-            </a:r>
-          </a:p>
-          <a:p>
-            <a:pPr algn="ctr"/>
-            <a:r>
-              <a:rPr lang="en-US" sz="1200">
-                <a:solidFill>
-                  <a:srgbClr val="607184"/>
-                </a:solidFill>
-                <a:latin typeface="Arial"/>
-                <a:ea typeface="Arial"/>
-              </a:rPr>
-              <a:t>Planned</a:t>
-            </a:r>
+              </a:defRPr>
+            </a:pPr>
+            <a:endParaRPr sz="1200"/>
           </a:p>
         </p:txBody>
       </p:sp>
@@ -2787,8 +2744,8 @@
         </p:nvSpPr>
         <p:spPr>
           <a:xfrm>
-            <a:off x="320040" y="5367528"/>
-            <a:ext cx="11558016" cy="1097280"/>
+            <a:off x="320039" y="5367528"/>
+            <a:ext cx="11665915" cy="1097280"/>
           </a:xfrm>
           <a:prstGeom prst="roundRect">
             <a:avLst>
@@ -3423,7 +3380,7 @@
         </p:nvSpPr>
         <p:spPr>
           <a:xfrm>
-            <a:off x="7593178" y="5971032"/>
+            <a:off x="7593178" y="5841187"/>
             <a:ext cx="1865376" cy="420624"/>
           </a:xfrm>
           <a:prstGeom prst="rect">
@@ -3440,27 +3397,23 @@
           </a:bodyPr>
           <a:lstStyle/>
           <a:p>
-            <a:r>
-              <a:rPr lang="en-US" sz="1300">
+            <a:pPr algn="l">
+              <a:defRPr sz="1300" b="0">
                 <a:solidFill>
                   <a:srgbClr val="20354A"/>
                 </a:solidFill>
                 <a:latin typeface="Arial"/>
                 <a:ea typeface="Arial"/>
+              </a:defRPr>
+            </a:pPr>
+            <a:r>
+              <a:rPr sz="1300">
+                <a:solidFill>
+                  <a:srgbClr val="20354A"/>
+                </a:solidFill>
+                <a:latin typeface="Arial"/>
               </a:rPr>
-              <a:t>Planned: restore</a:t>
-            </a:r>
-          </a:p>
-          <a:p>
-            <a:r>
-              <a:rPr lang="en-US" sz="1300">
-                <a:solidFill>
-                  <a:srgbClr val="20354A"/>
-                </a:solidFill>
-                <a:latin typeface="Arial"/>
-                <a:ea typeface="Arial"/>
-              </a:rPr>
-              <a:t>&amp; replay checks</a:t>
+              <a:t>Planned: restore &amp; replay checks</a:t>
             </a:r>
           </a:p>
         </p:txBody>
@@ -3548,7 +3501,7 @@
         <p:spPr>
           <a:xfrm>
             <a:off x="9904781" y="5504688"/>
-            <a:ext cx="1865376" cy="438912"/>
+            <a:ext cx="2081174" cy="438912"/>
           </a:xfrm>
           <a:prstGeom prst="rect">
             <a:avLst/>
@@ -3564,27 +3517,23 @@
           </a:bodyPr>
           <a:lstStyle/>
           <a:p>
-            <a:r>
-              <a:rPr lang="en-US" sz="1500" b="1">
+            <a:pPr algn="l">
+              <a:defRPr sz="1500" b="1">
                 <a:solidFill>
                   <a:srgbClr val="183B56"/>
                 </a:solidFill>
                 <a:latin typeface="Arial"/>
                 <a:ea typeface="Arial"/>
+              </a:defRPr>
+            </a:pPr>
+            <a:r>
+              <a:rPr sz="1500" b="1">
+                <a:solidFill>
+                  <a:srgbClr val="183B56"/>
+                </a:solidFill>
+                <a:latin typeface="Arial"/>
               </a:rPr>
-              <a:t>Dual-FPGA</a:t>
-            </a:r>
-          </a:p>
-          <a:p>
-            <a:r>
-              <a:rPr lang="en-US" sz="1500" b="1">
-                <a:solidFill>
-                  <a:srgbClr val="183B56"/>
-                </a:solidFill>
-                <a:latin typeface="Arial"/>
-                <a:ea typeface="Arial"/>
-              </a:rPr>
-              <a:t>prototype</a:t>
+              <a:t>Dual-FPGA prototype</a:t>
             </a:r>
           </a:p>
         </p:txBody>
@@ -3597,8 +3546,8 @@
         </p:nvSpPr>
         <p:spPr>
           <a:xfrm>
-            <a:off x="9904781" y="5971032"/>
-            <a:ext cx="1865376" cy="420624"/>
+            <a:off x="9904781" y="5881421"/>
+            <a:ext cx="1865376" cy="510235"/>
           </a:xfrm>
           <a:prstGeom prst="rect">
             <a:avLst/>
@@ -3614,27 +3563,23 @@
           </a:bodyPr>
           <a:lstStyle/>
           <a:p>
-            <a:r>
-              <a:rPr lang="en-US" sz="1300">
+            <a:pPr algn="l">
+              <a:defRPr sz="1300" b="0">
                 <a:solidFill>
                   <a:srgbClr val="20354A"/>
                 </a:solidFill>
                 <a:latin typeface="Arial"/>
                 <a:ea typeface="Arial"/>
+              </a:defRPr>
+            </a:pPr>
+            <a:r>
+              <a:rPr sz="1300">
+                <a:solidFill>
+                  <a:srgbClr val="20354A"/>
+                </a:solidFill>
+                <a:latin typeface="Arial"/>
               </a:rPr>
-              <a:t>Initial evaluation</a:t>
-            </a:r>
-          </a:p>
-          <a:p>
-            <a:r>
-              <a:rPr lang="en-US" sz="1300">
-                <a:solidFill>
-                  <a:srgbClr val="20354A"/>
-                </a:solidFill>
-                <a:latin typeface="Arial"/>
-                <a:ea typeface="Arial"/>
-              </a:rPr>
-              <a:t>and system tests</a:t>
+              <a:t>Initial evaluation and system tests</a:t>
             </a:r>
           </a:p>
         </p:txBody>

--- a/pptx/midterm/REMUS_Background_Slide_5.pptx
+++ b/pptx/midterm/REMUS_Background_Slide_5.pptx
@@ -5,10 +5,10 @@
     <p:sldMasterId xmlns:r="http://schemas.openxmlformats.org/officeDocument/2006/relationships" id="2147483648" r:id="rId1"/>
   </p:sldMasterIdLst>
   <p:notesMasterIdLst>
-    <p:notesMasterId r:id="Raa3df616ff8d45e0"/>
+    <p:notesMasterId r:id="R66b2d0c646334317"/>
   </p:notesMasterIdLst>
   <p:sldIdLst>
-    <p:sldId id="256" r:id="Rd9c9303ef08b4088"/>
+    <p:sldId id="256" r:id="R9be20ee9b9b545d5"/>
   </p:sldIdLst>
   <p:sldSz cx="12192000" cy="6858000" type="screen16x9"/>
   <p:notesSz cx="6858000" cy="9144000"/>
@@ -337,13 +337,13 @@
         <a:srgbClr val="E7E6E6"/>
       </a:lt2>
       <a:accent1>
-        <a:srgbClr val="183B56"/>
+        <a:srgbClr val="C00000"/>
       </a:accent1>
       <a:accent2>
-        <a:srgbClr val="008C95"/>
+        <a:srgbClr val="70AD47"/>
       </a:accent2>
       <a:accent3>
-        <a:srgbClr val="DF973E"/>
+        <a:srgbClr val="ED7D31"/>
       </a:accent3>
       <a:accent4>
         <a:srgbClr val="FFC000"/>
@@ -821,7 +821,7 @@
               </a:lnSpc>
               <a:defRPr sz="3000" b="1">
                 <a:solidFill>
-                  <a:srgbClr val="183B56"/>
+                  <a:srgbClr val="C00000"/>
                 </a:solidFill>
                 <a:latin typeface="Arial"/>
                 <a:ea typeface="Arial"/>
@@ -830,7 +830,7 @@
             <a:r>
               <a:rPr sz="3000" b="1">
                 <a:solidFill>
-                  <a:srgbClr val="183B56"/>
+                  <a:srgbClr val="C00000"/>
                 </a:solidFill>
                 <a:latin typeface="Arial"/>
               </a:rPr>
@@ -854,10 +854,12 @@
             <a:avLst/>
           </a:prstGeom>
           <a:solidFill>
-            <a:srgbClr val="008C95"/>
+            <a:srgbClr val="C55A11"/>
           </a:solidFill>
           <a:ln>
-            <a:noFill/>
+            <a:solidFill>
+              <a:srgbClr val="C55A11"/>
+            </a:solidFill>
           </a:ln>
         </p:spPr>
         <p:txBody>
@@ -868,7 +870,7 @@
           <a:p>
             <a:endParaRPr lang="en-US" sz="1800">
               <a:solidFill>
-                <a:srgbClr val="20354A"/>
+                <a:srgbClr val="C55A11"/>
               </a:solidFill>
               <a:latin typeface="Arial"/>
               <a:ea typeface="Arial"/>
@@ -904,7 +906,7 @@
             <a:r>
               <a:rPr lang="en-US" sz="2200" b="1">
                 <a:solidFill>
-                  <a:srgbClr val="183B56"/>
+                  <a:srgbClr val="333333"/>
                 </a:solidFill>
                 <a:latin typeface="Arial"/>
                 <a:ea typeface="Arial"/>
@@ -931,7 +933,7 @@
             </a:avLst>
           </a:prstGeom>
           <a:solidFill>
-            <a:srgbClr val="EAF4F3"/>
+            <a:srgbClr val="F1F7EC"/>
           </a:solidFill>
           <a:ln>
             <a:noFill/>
@@ -945,7 +947,7 @@
           <a:p>
             <a:endParaRPr lang="en-US" sz="1800">
               <a:solidFill>
-                <a:srgbClr val="20354A"/>
+                <a:srgbClr val="1F1F1F"/>
               </a:solidFill>
               <a:latin typeface="Arial"/>
               <a:ea typeface="Arial"/>
@@ -968,7 +970,7 @@
             <a:avLst/>
           </a:prstGeom>
           <a:solidFill>
-            <a:srgbClr val="008C95"/>
+            <a:srgbClr val="70AD47"/>
           </a:solidFill>
           <a:ln>
             <a:noFill/>
@@ -1023,7 +1025,7 @@
             <a:r>
               <a:rPr lang="en-US" sz="1700" b="1">
                 <a:solidFill>
-                  <a:srgbClr val="183B56"/>
+                  <a:srgbClr val="333333"/>
                 </a:solidFill>
                 <a:latin typeface="Arial"/>
                 <a:ea typeface="Arial"/>
@@ -1050,7 +1052,7 @@
             </a:avLst>
           </a:prstGeom>
           <a:solidFill>
-            <a:srgbClr val="EAF4F3"/>
+            <a:srgbClr val="F1F7EC"/>
           </a:solidFill>
           <a:ln>
             <a:noFill/>
@@ -1064,7 +1066,7 @@
           <a:p>
             <a:endParaRPr lang="en-US" sz="1800">
               <a:solidFill>
-                <a:srgbClr val="20354A"/>
+                <a:srgbClr val="1F1F1F"/>
               </a:solidFill>
               <a:latin typeface="Arial"/>
               <a:ea typeface="Arial"/>
@@ -1087,7 +1089,7 @@
             <a:avLst/>
           </a:prstGeom>
           <a:solidFill>
-            <a:srgbClr val="008C95"/>
+            <a:srgbClr val="70AD47"/>
           </a:solidFill>
           <a:ln>
             <a:noFill/>
@@ -1142,7 +1144,7 @@
             <a:r>
               <a:rPr lang="en-US" sz="1700" b="1">
                 <a:solidFill>
-                  <a:srgbClr val="183B56"/>
+                  <a:srgbClr val="333333"/>
                 </a:solidFill>
                 <a:latin typeface="Arial"/>
                 <a:ea typeface="Arial"/>
@@ -1155,7 +1157,7 @@
             <a:r>
               <a:rPr lang="en-US" sz="1700" b="1">
                 <a:solidFill>
-                  <a:srgbClr val="183B56"/>
+                  <a:srgbClr val="333333"/>
                 </a:solidFill>
                 <a:latin typeface="Arial"/>
                 <a:ea typeface="Arial"/>
@@ -1182,7 +1184,7 @@
             </a:avLst>
           </a:prstGeom>
           <a:solidFill>
-            <a:srgbClr val="EAF4F3"/>
+            <a:srgbClr val="F1F7EC"/>
           </a:solidFill>
           <a:ln>
             <a:noFill/>
@@ -1196,7 +1198,7 @@
           <a:p>
             <a:endParaRPr lang="en-US" sz="1800">
               <a:solidFill>
-                <a:srgbClr val="20354A"/>
+                <a:srgbClr val="1F1F1F"/>
               </a:solidFill>
               <a:latin typeface="Arial"/>
               <a:ea typeface="Arial"/>
@@ -1219,7 +1221,7 @@
             <a:avLst/>
           </a:prstGeom>
           <a:solidFill>
-            <a:srgbClr val="008C95"/>
+            <a:srgbClr val="70AD47"/>
           </a:solidFill>
           <a:ln>
             <a:noFill/>
@@ -1274,7 +1276,7 @@
             <a:r>
               <a:rPr lang="en-US" sz="1700" b="1">
                 <a:solidFill>
-                  <a:srgbClr val="183B56"/>
+                  <a:srgbClr val="333333"/>
                 </a:solidFill>
                 <a:latin typeface="Arial"/>
                 <a:ea typeface="Arial"/>
@@ -1287,7 +1289,7 @@
             <a:r>
               <a:rPr lang="en-US" sz="1700" b="1">
                 <a:solidFill>
-                  <a:srgbClr val="183B56"/>
+                  <a:srgbClr val="333333"/>
                 </a:solidFill>
                 <a:latin typeface="Arial"/>
                 <a:ea typeface="Arial"/>
@@ -1326,7 +1328,7 @@
             <a:r>
               <a:rPr lang="en-US" sz="1400">
                 <a:solidFill>
-                  <a:srgbClr val="20354A"/>
+                  <a:srgbClr val="1F1F1F"/>
                 </a:solidFill>
                 <a:latin typeface="Arial"/>
                 <a:ea typeface="Arial"/>
@@ -1339,7 +1341,7 @@
             <a:r>
               <a:rPr lang="en-US" sz="1400">
                 <a:solidFill>
-                  <a:srgbClr val="20354A"/>
+                  <a:srgbClr val="1F1F1F"/>
                 </a:solidFill>
                 <a:latin typeface="Arial"/>
                 <a:ea typeface="Arial"/>
@@ -1366,7 +1368,7 @@
             </a:avLst>
           </a:prstGeom>
           <a:solidFill>
-            <a:srgbClr val="EAF4F3"/>
+            <a:srgbClr val="F1F7EC"/>
           </a:solidFill>
           <a:ln>
             <a:noFill/>
@@ -1380,7 +1382,7 @@
           <a:p>
             <a:endParaRPr lang="en-US" sz="1800">
               <a:solidFill>
-                <a:srgbClr val="20354A"/>
+                <a:srgbClr val="1F1F1F"/>
               </a:solidFill>
               <a:latin typeface="Arial"/>
               <a:ea typeface="Arial"/>
@@ -1403,7 +1405,7 @@
             <a:avLst/>
           </a:prstGeom>
           <a:solidFill>
-            <a:srgbClr val="008C95"/>
+            <a:srgbClr val="70AD47"/>
           </a:solidFill>
           <a:ln>
             <a:noFill/>
@@ -1458,7 +1460,7 @@
             <a:r>
               <a:rPr lang="en-US" sz="1700" b="1">
                 <a:solidFill>
-                  <a:srgbClr val="183B56"/>
+                  <a:srgbClr val="333333"/>
                 </a:solidFill>
                 <a:latin typeface="Arial"/>
                 <a:ea typeface="Arial"/>
@@ -1471,7 +1473,7 @@
             <a:r>
               <a:rPr lang="en-US" sz="1700" b="1">
                 <a:solidFill>
-                  <a:srgbClr val="183B56"/>
+                  <a:srgbClr val="333333"/>
                 </a:solidFill>
                 <a:latin typeface="Arial"/>
                 <a:ea typeface="Arial"/>
@@ -1510,7 +1512,7 @@
             <a:r>
               <a:rPr lang="en-US" sz="1400">
                 <a:solidFill>
-                  <a:srgbClr val="20354A"/>
+                  <a:srgbClr val="1F1F1F"/>
                 </a:solidFill>
                 <a:latin typeface="Arial"/>
                 <a:ea typeface="Arial"/>
@@ -1537,7 +1539,7 @@
             </a:avLst>
           </a:prstGeom>
           <a:solidFill>
-            <a:srgbClr val="EAF4F3"/>
+            <a:srgbClr val="F1F7EC"/>
           </a:solidFill>
           <a:ln>
             <a:noFill/>
@@ -1551,7 +1553,7 @@
           <a:p>
             <a:endParaRPr lang="en-US" sz="1800">
               <a:solidFill>
-                <a:srgbClr val="20354A"/>
+                <a:srgbClr val="1F1F1F"/>
               </a:solidFill>
               <a:latin typeface="Arial"/>
               <a:ea typeface="Arial"/>
@@ -1574,7 +1576,7 @@
             <a:avLst/>
           </a:prstGeom>
           <a:solidFill>
-            <a:srgbClr val="008C95"/>
+            <a:srgbClr val="70AD47"/>
           </a:solidFill>
           <a:ln>
             <a:noFill/>
@@ -1629,7 +1631,7 @@
             <a:r>
               <a:rPr lang="en-US" sz="1700" b="1">
                 <a:solidFill>
-                  <a:srgbClr val="183B56"/>
+                  <a:srgbClr val="333333"/>
                 </a:solidFill>
                 <a:latin typeface="Arial"/>
                 <a:ea typeface="Arial"/>
@@ -1642,7 +1644,7 @@
             <a:r>
               <a:rPr lang="en-US" sz="1700" b="1">
                 <a:solidFill>
-                  <a:srgbClr val="183B56"/>
+                  <a:srgbClr val="333333"/>
                 </a:solidFill>
                 <a:latin typeface="Arial"/>
                 <a:ea typeface="Arial"/>
@@ -1681,7 +1683,7 @@
             <a:r>
               <a:rPr lang="en-US" sz="1400">
                 <a:solidFill>
-                  <a:srgbClr val="20354A"/>
+                  <a:srgbClr val="1F1F1F"/>
                 </a:solidFill>
                 <a:latin typeface="Arial"/>
                 <a:ea typeface="Arial"/>
@@ -1706,7 +1708,7 @@
             <a:avLst/>
           </a:prstGeom>
           <a:solidFill>
-            <a:srgbClr val="DF973E"/>
+            <a:srgbClr val="ED7D31"/>
           </a:solidFill>
           <a:ln>
             <a:noFill/>
@@ -1720,7 +1722,7 @@
           <a:p>
             <a:endParaRPr lang="en-US" sz="1800">
               <a:solidFill>
-                <a:srgbClr val="20354A"/>
+                <a:srgbClr val="1F1F1F"/>
               </a:solidFill>
               <a:latin typeface="Arial"/>
               <a:ea typeface="Arial"/>
@@ -1743,7 +1745,7 @@
             <a:avLst/>
           </a:prstGeom>
           <a:solidFill>
-            <a:srgbClr val="DF973E"/>
+            <a:srgbClr val="ED7D31"/>
           </a:solidFill>
           <a:ln>
             <a:noFill/>
@@ -1757,7 +1759,7 @@
           <a:p>
             <a:endParaRPr lang="en-US" sz="1800">
               <a:solidFill>
-                <a:srgbClr val="20354A"/>
+                <a:srgbClr val="1F1F1F"/>
               </a:solidFill>
               <a:latin typeface="Arial"/>
               <a:ea typeface="Arial"/>
@@ -1780,7 +1782,7 @@
             <a:avLst/>
           </a:prstGeom>
           <a:solidFill>
-            <a:srgbClr val="DF973E"/>
+            <a:srgbClr val="ED7D31"/>
           </a:solidFill>
           <a:ln>
             <a:noFill/>
@@ -1794,7 +1796,7 @@
           <a:p>
             <a:endParaRPr lang="en-US" sz="1800">
               <a:solidFill>
-                <a:srgbClr val="20354A"/>
+                <a:srgbClr val="1F1F1F"/>
               </a:solidFill>
               <a:latin typeface="Arial"/>
               <a:ea typeface="Arial"/>
@@ -1817,7 +1819,7 @@
             <a:avLst/>
           </a:prstGeom>
           <a:solidFill>
-            <a:srgbClr val="DF973E"/>
+            <a:srgbClr val="ED7D31"/>
           </a:solidFill>
           <a:ln>
             <a:noFill/>
@@ -1831,7 +1833,7 @@
           <a:p>
             <a:endParaRPr lang="en-US" sz="1800">
               <a:solidFill>
-                <a:srgbClr val="20354A"/>
+                <a:srgbClr val="1F1F1F"/>
               </a:solidFill>
               <a:latin typeface="Arial"/>
               <a:ea typeface="Arial"/>
@@ -1848,7 +1850,7 @@
           <p:nvPr/>
         </p:nvPicPr>
         <p:blipFill>
-          <a:blip xmlns:r="http://schemas.openxmlformats.org/officeDocument/2006/relationships" r:embed="Rfb26429d0c184e71"/>
+          <a:blip xmlns:r="http://schemas.openxmlformats.org/officeDocument/2006/relationships" r:embed="R34800de2add7480b"/>
           <a:srcRect l="22807" t="18580" r="21929" b="14354"/>
           <a:stretch>
             <a:fillRect/>
@@ -1873,7 +1875,7 @@
           <p:nvPr/>
         </p:nvPicPr>
         <p:blipFill>
-          <a:blip xmlns:r="http://schemas.openxmlformats.org/officeDocument/2006/relationships" r:embed="R1984d9b74c864437"/>
+          <a:blip xmlns:r="http://schemas.openxmlformats.org/officeDocument/2006/relationships" r:embed="Rfe95a00339734461"/>
           <a:srcRect l="15869" t="18660" r="15789" b="18660"/>
           <a:stretch>
             <a:fillRect/>
@@ -1898,7 +1900,7 @@
           <p:nvPr/>
         </p:nvPicPr>
         <p:blipFill>
-          <a:blip xmlns:r="http://schemas.openxmlformats.org/officeDocument/2006/relationships" r:embed="Rbe03d3b990204695"/>
+          <a:blip xmlns:r="http://schemas.openxmlformats.org/officeDocument/2006/relationships" r:embed="Rc3c79665f15c4873"/>
           <a:srcRect l="21371" t="23684" r="21291" b="20972"/>
           <a:stretch>
             <a:fillRect/>
@@ -1923,7 +1925,7 @@
           <p:nvPr/>
         </p:nvPicPr>
         <p:blipFill>
-          <a:blip xmlns:r="http://schemas.openxmlformats.org/officeDocument/2006/relationships" r:embed="Rb40915c6070843e2"/>
+          <a:blip xmlns:r="http://schemas.openxmlformats.org/officeDocument/2006/relationships" r:embed="R0dfb33756da34c8c"/>
           <a:srcRect l="21371" t="23684" r="21291" b="20972"/>
           <a:stretch>
             <a:fillRect/>
@@ -1948,7 +1950,7 @@
           <p:nvPr/>
         </p:nvPicPr>
         <p:blipFill>
-          <a:blip xmlns:r="http://schemas.openxmlformats.org/officeDocument/2006/relationships" r:embed="R13ce9b7ec8d2457e"/>
+          <a:blip xmlns:r="http://schemas.openxmlformats.org/officeDocument/2006/relationships" r:embed="R9dbecea887da414a"/>
           <a:srcRect l="21371" t="23684" r="21291" b="20972"/>
           <a:stretch>
             <a:fillRect/>
@@ -1973,7 +1975,7 @@
           <p:nvPr/>
         </p:nvPicPr>
         <p:blipFill>
-          <a:blip xmlns:r="http://schemas.openxmlformats.org/officeDocument/2006/relationships" r:embed="R9cf2c4b472494a92"/>
+          <a:blip xmlns:r="http://schemas.openxmlformats.org/officeDocument/2006/relationships" r:embed="R9efb3e874d3249fd"/>
           <a:srcRect l="21371" t="23684" r="21291" b="20972"/>
           <a:stretch>
             <a:fillRect/>
@@ -2008,7 +2010,7 @@
           </a:prstGeom>
           <a:ln w="20320">
             <a:solidFill>
-              <a:srgbClr val="DF973E"/>
+              <a:srgbClr val="ED7D31"/>
             </a:solidFill>
           </a:ln>
         </p:spPr>
@@ -2032,7 +2034,7 @@
           </a:prstGeom>
           <a:ln w="20320">
             <a:solidFill>
-              <a:srgbClr val="DF973E"/>
+              <a:srgbClr val="ED7D31"/>
             </a:solidFill>
           </a:ln>
         </p:spPr>
@@ -2056,7 +2058,7 @@
           </a:prstGeom>
           <a:ln w="20320">
             <a:solidFill>
-              <a:srgbClr val="DF973E"/>
+              <a:srgbClr val="ED7D31"/>
             </a:solidFill>
           </a:ln>
         </p:spPr>
@@ -2080,7 +2082,7 @@
           </a:prstGeom>
           <a:ln w="20320">
             <a:solidFill>
-              <a:srgbClr val="DF973E"/>
+              <a:srgbClr val="ED7D31"/>
             </a:solidFill>
           </a:ln>
         </p:spPr>
@@ -2113,7 +2115,7 @@
             <a:pPr algn="ctr">
               <a:defRPr sz="1100" b="0">
                 <a:solidFill>
-                  <a:srgbClr val="607184"/>
+                  <a:srgbClr val="898989"/>
                 </a:solidFill>
                 <a:latin typeface="Arial"/>
                 <a:ea typeface="Arial"/>
@@ -2142,7 +2144,7 @@
           </a:solidFill>
           <a:ln w="27940">
             <a:solidFill>
-              <a:srgbClr val="183B56"/>
+              <a:srgbClr val="333333"/>
             </a:solidFill>
           </a:ln>
         </p:spPr>
@@ -2154,7 +2156,7 @@
           <a:p>
             <a:endParaRPr lang="en-US" sz="1800">
               <a:solidFill>
-                <a:srgbClr val="20354A"/>
+                <a:srgbClr val="1F1F1F"/>
               </a:solidFill>
               <a:latin typeface="Arial"/>
               <a:ea typeface="Arial"/>
@@ -2178,7 +2180,7 @@
           </a:prstGeom>
           <a:ln w="25400">
             <a:solidFill>
-              <a:srgbClr val="183B56"/>
+              <a:srgbClr val="333333"/>
             </a:solidFill>
           </a:ln>
         </p:spPr>
@@ -2199,7 +2201,7 @@
           </a:prstGeom>
           <a:ln w="25400">
             <a:solidFill>
-              <a:srgbClr val="183B56"/>
+              <a:srgbClr val="333333"/>
             </a:solidFill>
           </a:ln>
         </p:spPr>
@@ -2220,7 +2222,7 @@
           </a:prstGeom>
           <a:ln w="20320">
             <a:solidFill>
-              <a:srgbClr val="183B56"/>
+              <a:srgbClr val="333333"/>
             </a:solidFill>
             <a:prstDash val="dash"/>
           </a:ln>
@@ -2245,7 +2247,7 @@
           </a:solidFill>
           <a:ln w="27940">
             <a:solidFill>
-              <a:srgbClr val="008C95"/>
+              <a:srgbClr val="70AD47"/>
             </a:solidFill>
           </a:ln>
         </p:spPr>
@@ -2257,7 +2259,7 @@
           <a:p>
             <a:endParaRPr lang="en-US" sz="1800">
               <a:solidFill>
-                <a:srgbClr val="20354A"/>
+                <a:srgbClr val="1F1F1F"/>
               </a:solidFill>
               <a:latin typeface="Arial"/>
               <a:ea typeface="Arial"/>
@@ -2280,7 +2282,7 @@
             <a:avLst/>
           </a:prstGeom>
           <a:solidFill>
-            <a:srgbClr val="008C95"/>
+            <a:srgbClr val="70AD47"/>
           </a:solidFill>
           <a:ln>
             <a:noFill/>
@@ -2294,7 +2296,7 @@
           <a:p>
             <a:endParaRPr lang="en-US" sz="1800">
               <a:solidFill>
-                <a:srgbClr val="20354A"/>
+                <a:srgbClr val="1F1F1F"/>
               </a:solidFill>
               <a:latin typeface="Arial"/>
               <a:ea typeface="Arial"/>
@@ -2317,7 +2319,7 @@
             <a:avLst/>
           </a:prstGeom>
           <a:solidFill>
-            <a:srgbClr val="008C95"/>
+            <a:srgbClr val="70AD47"/>
           </a:solidFill>
           <a:ln>
             <a:noFill/>
@@ -2331,7 +2333,7 @@
           <a:p>
             <a:endParaRPr lang="en-US" sz="1800">
               <a:solidFill>
-                <a:srgbClr val="20354A"/>
+                <a:srgbClr val="1F1F1F"/>
               </a:solidFill>
               <a:latin typeface="Arial"/>
               <a:ea typeface="Arial"/>
@@ -2355,7 +2357,7 @@
           </a:prstGeom>
           <a:ln w="20320">
             <a:solidFill>
-              <a:srgbClr val="183B56"/>
+              <a:srgbClr val="333333"/>
             </a:solidFill>
             <a:prstDash val="dash"/>
           </a:ln>
@@ -2380,7 +2382,7 @@
           </a:solidFill>
           <a:ln w="27940">
             <a:solidFill>
-              <a:srgbClr val="183B56"/>
+              <a:srgbClr val="333333"/>
             </a:solidFill>
           </a:ln>
         </p:spPr>
@@ -2392,7 +2394,7 @@
           <a:p>
             <a:endParaRPr lang="en-US" sz="1800">
               <a:solidFill>
-                <a:srgbClr val="20354A"/>
+                <a:srgbClr val="1F1F1F"/>
               </a:solidFill>
               <a:latin typeface="Arial"/>
               <a:ea typeface="Arial"/>
@@ -2416,7 +2418,7 @@
           </a:prstGeom>
           <a:ln w="25400">
             <a:solidFill>
-              <a:srgbClr val="183B56"/>
+              <a:srgbClr val="333333"/>
             </a:solidFill>
           </a:ln>
         </p:spPr>
@@ -2437,7 +2439,7 @@
           </a:prstGeom>
           <a:ln w="25400">
             <a:solidFill>
-              <a:srgbClr val="183B56"/>
+              <a:srgbClr val="333333"/>
             </a:solidFill>
           </a:ln>
         </p:spPr>
@@ -2458,7 +2460,7 @@
           </a:prstGeom>
           <a:ln w="20320">
             <a:solidFill>
-              <a:srgbClr val="183B56"/>
+              <a:srgbClr val="333333"/>
             </a:solidFill>
             <a:prstDash val="dash"/>
           </a:ln>
@@ -2483,7 +2485,7 @@
           </a:prstGeom>
           <a:ln w="20320">
             <a:solidFill>
-              <a:srgbClr val="183B56"/>
+              <a:srgbClr val="333333"/>
             </a:solidFill>
             <a:tailEnd type="triangle"/>
           </a:ln>
@@ -2508,7 +2510,7 @@
           </a:prstGeom>
           <a:ln w="20320">
             <a:solidFill>
-              <a:srgbClr val="183B56"/>
+              <a:srgbClr val="333333"/>
             </a:solidFill>
             <a:tailEnd type="triangle"/>
           </a:ln>
@@ -2530,7 +2532,7 @@
           </a:prstGeom>
           <a:ln w="20320">
             <a:solidFill>
-              <a:srgbClr val="183B56"/>
+              <a:srgbClr val="333333"/>
             </a:solidFill>
             <a:prstDash val="dash"/>
           </a:ln>
@@ -2545,7 +2547,7 @@
           <p:nvPr/>
         </p:nvPicPr>
         <p:blipFill>
-          <a:blip xmlns:r="http://schemas.openxmlformats.org/officeDocument/2006/relationships" r:embed="R0eca468e47bb443e"/>
+          <a:blip xmlns:r="http://schemas.openxmlformats.org/officeDocument/2006/relationships" r:embed="R7c3de2148f7444e3"/>
           <a:srcRect l="16746" t="16427" r="16746" b="11961"/>
           <a:stretch>
             <a:fillRect/>
@@ -2570,7 +2572,7 @@
           <p:nvPr/>
         </p:nvPicPr>
         <p:blipFill>
-          <a:blip xmlns:r="http://schemas.openxmlformats.org/officeDocument/2006/relationships" r:embed="R52e1c8c028144cc1"/>
+          <a:blip xmlns:r="http://schemas.openxmlformats.org/officeDocument/2006/relationships" r:embed="Rb6a38471eb064efa"/>
           <a:srcRect l="12280" t="25518" r="12200" b="19936"/>
           <a:stretch>
             <a:fillRect/>
@@ -2601,7 +2603,7 @@
             <a:avLst/>
           </a:prstGeom>
           <a:solidFill>
-            <a:srgbClr val="008C95"/>
+            <a:srgbClr val="70AD47"/>
           </a:solidFill>
           <a:ln>
             <a:noFill/>
@@ -2615,7 +2617,7 @@
           <a:p>
             <a:endParaRPr lang="en-US" sz="1800">
               <a:solidFill>
-                <a:srgbClr val="20354A"/>
+                <a:srgbClr val="1F1F1F"/>
               </a:solidFill>
               <a:latin typeface="Arial"/>
               <a:ea typeface="Arial"/>
@@ -2651,7 +2653,7 @@
             <a:pPr algn="ctr">
               <a:defRPr sz="1200" b="0">
                 <a:solidFill>
-                  <a:srgbClr val="607184"/>
+                  <a:srgbClr val="898989"/>
                 </a:solidFill>
                 <a:latin typeface="Arial"/>
                 <a:ea typeface="Arial"/>
@@ -2689,7 +2691,7 @@
             <a:r>
               <a:rPr lang="en-US" sz="2200" b="1">
                 <a:solidFill>
-                  <a:srgbClr val="183B56"/>
+                  <a:srgbClr val="333333"/>
                 </a:solidFill>
                 <a:latin typeface="Arial"/>
                 <a:ea typeface="Arial"/>
@@ -2714,7 +2716,7 @@
             <a:avLst/>
           </a:prstGeom>
           <a:solidFill>
-            <a:srgbClr val="BDCBD4"/>
+            <a:srgbClr val="D1D1D1"/>
           </a:solidFill>
           <a:ln>
             <a:noFill/>
@@ -2728,7 +2730,7 @@
           <a:p>
             <a:endParaRPr lang="en-US" sz="1800">
               <a:solidFill>
-                <a:srgbClr val="20354A"/>
+                <a:srgbClr val="1F1F1F"/>
               </a:solidFill>
               <a:latin typeface="Arial"/>
               <a:ea typeface="Arial"/>
@@ -2753,7 +2755,7 @@
             </a:avLst>
           </a:prstGeom>
           <a:solidFill>
-            <a:srgbClr val="EAF4F3"/>
+            <a:srgbClr val="F1F7EC"/>
           </a:solidFill>
           <a:ln>
             <a:noFill/>
@@ -2767,7 +2769,7 @@
           <a:p>
             <a:endParaRPr lang="en-US" sz="1800">
               <a:solidFill>
-                <a:srgbClr val="20354A"/>
+                <a:srgbClr val="1F1F1F"/>
               </a:solidFill>
               <a:latin typeface="Arial"/>
               <a:ea typeface="Arial"/>
@@ -2790,7 +2792,7 @@
             <a:avLst/>
           </a:prstGeom>
           <a:solidFill>
-            <a:srgbClr val="008C95"/>
+            <a:srgbClr val="70AD47"/>
           </a:solidFill>
           <a:ln>
             <a:noFill/>
@@ -2804,7 +2806,7 @@
           <a:p>
             <a:endParaRPr lang="en-US" sz="1800">
               <a:solidFill>
-                <a:srgbClr val="20354A"/>
+                <a:srgbClr val="1F1F1F"/>
               </a:solidFill>
               <a:latin typeface="Arial"/>
               <a:ea typeface="Arial"/>
@@ -2840,7 +2842,7 @@
             <a:r>
               <a:rPr lang="en-US" sz="1500" b="1">
                 <a:solidFill>
-                  <a:srgbClr val="183B56"/>
+                  <a:srgbClr val="333333"/>
                 </a:solidFill>
                 <a:latin typeface="Arial"/>
                 <a:ea typeface="Arial"/>
@@ -2852,7 +2854,7 @@
             <a:r>
               <a:rPr lang="en-US" sz="1500" b="1">
                 <a:solidFill>
-                  <a:srgbClr val="183B56"/>
+                  <a:srgbClr val="333333"/>
                 </a:solidFill>
                 <a:latin typeface="Arial"/>
                 <a:ea typeface="Arial"/>
@@ -2890,7 +2892,7 @@
             <a:r>
               <a:rPr lang="en-US" sz="1300">
                 <a:solidFill>
-                  <a:srgbClr val="20354A"/>
+                  <a:srgbClr val="1F1F1F"/>
                 </a:solidFill>
                 <a:latin typeface="Arial"/>
                 <a:ea typeface="Arial"/>
@@ -2902,7 +2904,7 @@
             <a:r>
               <a:rPr lang="en-US" sz="1300">
                 <a:solidFill>
-                  <a:srgbClr val="20354A"/>
+                  <a:srgbClr val="1F1F1F"/>
                 </a:solidFill>
                 <a:latin typeface="Arial"/>
                 <a:ea typeface="Arial"/>
@@ -2927,7 +2929,7 @@
             <a:avLst/>
           </a:prstGeom>
           <a:solidFill>
-            <a:srgbClr val="BDCBD4"/>
+            <a:srgbClr val="D1D1D1"/>
           </a:solidFill>
           <a:ln>
             <a:noFill/>
@@ -2941,7 +2943,7 @@
           <a:p>
             <a:endParaRPr lang="en-US" sz="1800">
               <a:solidFill>
-                <a:srgbClr val="20354A"/>
+                <a:srgbClr val="1F1F1F"/>
               </a:solidFill>
               <a:latin typeface="Arial"/>
               <a:ea typeface="Arial"/>
@@ -2964,7 +2966,7 @@
             <a:avLst/>
           </a:prstGeom>
           <a:solidFill>
-            <a:srgbClr val="008C95"/>
+            <a:srgbClr val="70AD47"/>
           </a:solidFill>
           <a:ln>
             <a:noFill/>
@@ -2978,7 +2980,7 @@
           <a:p>
             <a:endParaRPr lang="en-US" sz="1800">
               <a:solidFill>
-                <a:srgbClr val="20354A"/>
+                <a:srgbClr val="1F1F1F"/>
               </a:solidFill>
               <a:latin typeface="Arial"/>
               <a:ea typeface="Arial"/>
@@ -3014,7 +3016,7 @@
             <a:r>
               <a:rPr lang="en-US" sz="1500" b="1">
                 <a:solidFill>
-                  <a:srgbClr val="183B56"/>
+                  <a:srgbClr val="333333"/>
                 </a:solidFill>
                 <a:latin typeface="Arial"/>
                 <a:ea typeface="Arial"/>
@@ -3026,7 +3028,7 @@
             <a:r>
               <a:rPr lang="en-US" sz="1500" b="1">
                 <a:solidFill>
-                  <a:srgbClr val="183B56"/>
+                  <a:srgbClr val="333333"/>
                 </a:solidFill>
                 <a:latin typeface="Arial"/>
                 <a:ea typeface="Arial"/>
@@ -3064,7 +3066,7 @@
             <a:r>
               <a:rPr lang="en-US" sz="1300">
                 <a:solidFill>
-                  <a:srgbClr val="20354A"/>
+                  <a:srgbClr val="1F1F1F"/>
                 </a:solidFill>
                 <a:latin typeface="Arial"/>
                 <a:ea typeface="Arial"/>
@@ -3076,7 +3078,7 @@
             <a:r>
               <a:rPr lang="en-US" sz="1300">
                 <a:solidFill>
-                  <a:srgbClr val="20354A"/>
+                  <a:srgbClr val="1F1F1F"/>
                 </a:solidFill>
                 <a:latin typeface="Arial"/>
                 <a:ea typeface="Arial"/>
@@ -3101,7 +3103,7 @@
             <a:avLst/>
           </a:prstGeom>
           <a:solidFill>
-            <a:srgbClr val="BDCBD4"/>
+            <a:srgbClr val="D1D1D1"/>
           </a:solidFill>
           <a:ln>
             <a:noFill/>
@@ -3115,7 +3117,7 @@
           <a:p>
             <a:endParaRPr lang="en-US" sz="1800">
               <a:solidFill>
-                <a:srgbClr val="20354A"/>
+                <a:srgbClr val="1F1F1F"/>
               </a:solidFill>
               <a:latin typeface="Arial"/>
               <a:ea typeface="Arial"/>
@@ -3138,7 +3140,7 @@
             <a:avLst/>
           </a:prstGeom>
           <a:solidFill>
-            <a:srgbClr val="008C95"/>
+            <a:srgbClr val="70AD47"/>
           </a:solidFill>
           <a:ln>
             <a:noFill/>
@@ -3152,7 +3154,7 @@
           <a:p>
             <a:endParaRPr lang="en-US" sz="1800">
               <a:solidFill>
-                <a:srgbClr val="20354A"/>
+                <a:srgbClr val="1F1F1F"/>
               </a:solidFill>
               <a:latin typeface="Arial"/>
               <a:ea typeface="Arial"/>
@@ -3188,7 +3190,7 @@
             <a:r>
               <a:rPr lang="en-US" sz="1500" b="1">
                 <a:solidFill>
-                  <a:srgbClr val="183B56"/>
+                  <a:srgbClr val="333333"/>
                 </a:solidFill>
                 <a:latin typeface="Arial"/>
                 <a:ea typeface="Arial"/>
@@ -3200,7 +3202,7 @@
             <a:r>
               <a:rPr lang="en-US" sz="1500" b="1">
                 <a:solidFill>
-                  <a:srgbClr val="183B56"/>
+                  <a:srgbClr val="333333"/>
                 </a:solidFill>
                 <a:latin typeface="Arial"/>
                 <a:ea typeface="Arial"/>
@@ -3238,7 +3240,7 @@
             <a:r>
               <a:rPr lang="en-US" sz="1300">
                 <a:solidFill>
-                  <a:srgbClr val="20354A"/>
+                  <a:srgbClr val="1F1F1F"/>
                 </a:solidFill>
                 <a:latin typeface="Arial"/>
                 <a:ea typeface="Arial"/>
@@ -3250,7 +3252,7 @@
             <a:r>
               <a:rPr lang="en-US" sz="1300">
                 <a:solidFill>
-                  <a:srgbClr val="20354A"/>
+                  <a:srgbClr val="1F1F1F"/>
                 </a:solidFill>
                 <a:latin typeface="Arial"/>
                 <a:ea typeface="Arial"/>
@@ -3275,7 +3277,7 @@
             <a:avLst/>
           </a:prstGeom>
           <a:solidFill>
-            <a:srgbClr val="BDCBD4"/>
+            <a:srgbClr val="D1D1D1"/>
           </a:solidFill>
           <a:ln>
             <a:noFill/>
@@ -3289,7 +3291,7 @@
           <a:p>
             <a:endParaRPr lang="en-US" sz="1800">
               <a:solidFill>
-                <a:srgbClr val="20354A"/>
+                <a:srgbClr val="1F1F1F"/>
               </a:solidFill>
               <a:latin typeface="Arial"/>
               <a:ea typeface="Arial"/>
@@ -3312,7 +3314,7 @@
             <a:avLst/>
           </a:prstGeom>
           <a:solidFill>
-            <a:srgbClr val="008C95"/>
+            <a:srgbClr val="70AD47"/>
           </a:solidFill>
           <a:ln>
             <a:noFill/>
@@ -3326,7 +3328,7 @@
           <a:p>
             <a:endParaRPr lang="en-US" sz="1800">
               <a:solidFill>
-                <a:srgbClr val="20354A"/>
+                <a:srgbClr val="1F1F1F"/>
               </a:solidFill>
               <a:latin typeface="Arial"/>
               <a:ea typeface="Arial"/>
@@ -3362,7 +3364,7 @@
             <a:r>
               <a:rPr lang="en-US" sz="1500" b="1">
                 <a:solidFill>
-                  <a:srgbClr val="183B56"/>
+                  <a:srgbClr val="333333"/>
                 </a:solidFill>
                 <a:latin typeface="Arial"/>
                 <a:ea typeface="Arial"/>
@@ -3400,7 +3402,7 @@
             <a:pPr algn="l">
               <a:defRPr sz="1300" b="0">
                 <a:solidFill>
-                  <a:srgbClr val="20354A"/>
+                  <a:srgbClr val="1F1F1F"/>
                 </a:solidFill>
                 <a:latin typeface="Arial"/>
                 <a:ea typeface="Arial"/>
@@ -3409,7 +3411,7 @@
             <a:r>
               <a:rPr sz="1300">
                 <a:solidFill>
-                  <a:srgbClr val="20354A"/>
+                  <a:srgbClr val="1F1F1F"/>
                 </a:solidFill>
                 <a:latin typeface="Arial"/>
               </a:rPr>
@@ -3433,7 +3435,7 @@
             <a:avLst/>
           </a:prstGeom>
           <a:solidFill>
-            <a:srgbClr val="BDCBD4"/>
+            <a:srgbClr val="D1D1D1"/>
           </a:solidFill>
           <a:ln>
             <a:noFill/>
@@ -3447,7 +3449,7 @@
           <a:p>
             <a:endParaRPr lang="en-US" sz="1800">
               <a:solidFill>
-                <a:srgbClr val="20354A"/>
+                <a:srgbClr val="1F1F1F"/>
               </a:solidFill>
               <a:latin typeface="Arial"/>
               <a:ea typeface="Arial"/>
@@ -3470,7 +3472,7 @@
             <a:avLst/>
           </a:prstGeom>
           <a:solidFill>
-            <a:srgbClr val="008C95"/>
+            <a:srgbClr val="70AD47"/>
           </a:solidFill>
           <a:ln>
             <a:noFill/>
@@ -3484,7 +3486,7 @@
           <a:p>
             <a:endParaRPr lang="en-US" sz="1800">
               <a:solidFill>
-                <a:srgbClr val="20354A"/>
+                <a:srgbClr val="1F1F1F"/>
               </a:solidFill>
               <a:latin typeface="Arial"/>
               <a:ea typeface="Arial"/>
@@ -3520,7 +3522,7 @@
             <a:pPr algn="l">
               <a:defRPr sz="1500" b="1">
                 <a:solidFill>
-                  <a:srgbClr val="183B56"/>
+                  <a:srgbClr val="333333"/>
                 </a:solidFill>
                 <a:latin typeface="Arial"/>
                 <a:ea typeface="Arial"/>
@@ -3529,7 +3531,7 @@
             <a:r>
               <a:rPr sz="1500" b="1">
                 <a:solidFill>
-                  <a:srgbClr val="183B56"/>
+                  <a:srgbClr val="333333"/>
                 </a:solidFill>
                 <a:latin typeface="Arial"/>
               </a:rPr>
@@ -3566,7 +3568,7 @@
             <a:pPr algn="l">
               <a:defRPr sz="1300" b="0">
                 <a:solidFill>
-                  <a:srgbClr val="20354A"/>
+                  <a:srgbClr val="1F1F1F"/>
                 </a:solidFill>
                 <a:latin typeface="Arial"/>
                 <a:ea typeface="Arial"/>
@@ -3575,7 +3577,7 @@
             <a:r>
               <a:rPr sz="1300">
                 <a:solidFill>
-                  <a:srgbClr val="20354A"/>
+                  <a:srgbClr val="1F1F1F"/>
                 </a:solidFill>
                 <a:latin typeface="Arial"/>
               </a:rPr>
@@ -3613,7 +3615,7 @@
             <a:r>
               <a:rPr lang="en-US" sz="1000">
                 <a:solidFill>
-                  <a:srgbClr val="607184"/>
+                  <a:srgbClr val="898989"/>
                 </a:solidFill>
                 <a:latin typeface="Arial"/>
                 <a:ea typeface="Arial"/>
@@ -3645,13 +3647,13 @@
         <a:srgbClr val="E7E6E6"/>
       </a:lt2>
       <a:accent1>
-        <a:srgbClr val="183B56"/>
+        <a:srgbClr val="C00000"/>
       </a:accent1>
       <a:accent2>
-        <a:srgbClr val="008C95"/>
+        <a:srgbClr val="70AD47"/>
       </a:accent2>
       <a:accent3>
-        <a:srgbClr val="DF973E"/>
+        <a:srgbClr val="ED7D31"/>
       </a:accent3>
       <a:accent4>
         <a:srgbClr val="FFC000"/>
